--- a/slides/usecases/02_Wartungsrisiko.pptx
+++ b/slides/usecases/02_Wartungsrisiko.pptx
@@ -8118,7 +8118,7 @@
                   <a:srgbClr val="404040"/>
                 </a:solidFill>
               </a:rPr>
-              <a:t>Beigelegt ist eine Schattenliste zum 24.08.2026; bewertbar wird sie erst nach 90 Tagen.</a:t>
+              <a:t>Beigelegt ist eine Prognoseliste zum 24.08.2026; bewertbar wird sie erst nach 90 Tagen.</a:t>
             </a:r>
           </a:p>
         </p:txBody>
